--- a/capstone/연구계획서22000561이재용0910.pptx
+++ b/capstone/연구계획서22000561이재용0910.pptx
@@ -134,7 +134,7 @@
 <file path=ppt/revisionInfo.xml><?xml version="1.0" encoding="utf-8"?>
 <p1510:revInfo xmlns:a="http://schemas.openxmlformats.org/drawingml/2006/main" xmlns:r="http://schemas.openxmlformats.org/officeDocument/2006/relationships" xmlns:p1510="http://schemas.microsoft.com/office/powerpoint/2015/10/main">
   <p1510:revLst>
-    <p1510:client id="{83E41FFC-CC75-493F-9B3C-1D9FBFF51EB9}" v="91" dt="2026-09-10T07:13:13.775"/>
+    <p1510:client id="{83E41FFC-CC75-493F-9B3C-1D9FBFF51EB9}" v="116" dt="2026-09-10T07:35:56.951"/>
   </p1510:revLst>
 </p1510:revInfo>
 </file>
@@ -144,7 +144,7 @@
   <pc:docChgLst>
     <pc:chgData name="jeayong lee" userId="0e8205fbd6162578" providerId="LiveId" clId="{AE34F6A3-7111-4D1D-9D41-1048805A1372}"/>
     <pc:docChg chg="undo redo custSel addSld delSld modSld">
-      <pc:chgData name="jeayong lee" userId="0e8205fbd6162578" providerId="LiveId" clId="{AE34F6A3-7111-4D1D-9D41-1048805A1372}" dt="2026-09-10T07:14:22.743" v="593" actId="478"/>
+      <pc:chgData name="jeayong lee" userId="0e8205fbd6162578" providerId="LiveId" clId="{AE34F6A3-7111-4D1D-9D41-1048805A1372}" dt="2026-09-10T07:36:15.816" v="774" actId="1076"/>
       <pc:docMkLst>
         <pc:docMk/>
       </pc:docMkLst>
@@ -170,6 +170,37 @@
             <ac:spMk id="19" creationId="{00000000-0000-0000-0000-000000000000}"/>
           </ac:spMkLst>
         </pc:spChg>
+      </pc:sldChg>
+      <pc:sldChg chg="addSp delSp modSp mod">
+        <pc:chgData name="jeayong lee" userId="0e8205fbd6162578" providerId="LiveId" clId="{AE34F6A3-7111-4D1D-9D41-1048805A1372}" dt="2026-09-10T07:34:15.315" v="750" actId="20577"/>
+        <pc:sldMkLst>
+          <pc:docMk/>
+          <pc:sldMk cId="0" sldId="263"/>
+        </pc:sldMkLst>
+        <pc:spChg chg="mod">
+          <ac:chgData name="jeayong lee" userId="0e8205fbd6162578" providerId="LiveId" clId="{AE34F6A3-7111-4D1D-9D41-1048805A1372}" dt="2026-09-10T07:34:15.315" v="750" actId="20577"/>
+          <ac:spMkLst>
+            <pc:docMk/>
+            <pc:sldMk cId="0" sldId="263"/>
+            <ac:spMk id="19" creationId="{00000000-0000-0000-0000-000000000000}"/>
+          </ac:spMkLst>
+        </pc:spChg>
+        <pc:spChg chg="add mod">
+          <ac:chgData name="jeayong lee" userId="0e8205fbd6162578" providerId="LiveId" clId="{AE34F6A3-7111-4D1D-9D41-1048805A1372}" dt="2026-09-10T07:24:30.155" v="630" actId="20577"/>
+          <ac:spMkLst>
+            <pc:docMk/>
+            <pc:sldMk cId="0" sldId="263"/>
+            <ac:spMk id="32" creationId="{48318DAD-44C7-8E84-C978-920D5418318A}"/>
+          </ac:spMkLst>
+        </pc:spChg>
+        <pc:graphicFrameChg chg="add del mod modGraphic">
+          <ac:chgData name="jeayong lee" userId="0e8205fbd6162578" providerId="LiveId" clId="{AE34F6A3-7111-4D1D-9D41-1048805A1372}" dt="2026-09-10T07:23:52.879" v="604" actId="14100"/>
+          <ac:graphicFrameMkLst>
+            <pc:docMk/>
+            <pc:sldMk cId="0" sldId="263"/>
+            <ac:graphicFrameMk id="38" creationId="{878D04B7-3C42-FB00-C184-302EFB5B9EE6}"/>
+          </ac:graphicFrameMkLst>
+        </pc:graphicFrameChg>
       </pc:sldChg>
       <pc:sldChg chg="modSp mod">
         <pc:chgData name="jeayong lee" userId="0e8205fbd6162578" providerId="LiveId" clId="{AE34F6A3-7111-4D1D-9D41-1048805A1372}" dt="2026-09-10T06:31:00.822" v="349" actId="14100"/>
@@ -626,7 +657,7 @@
         </pc:grpChg>
       </pc:sldChg>
       <pc:sldChg chg="addSp delSp modSp mod">
-        <pc:chgData name="jeayong lee" userId="0e8205fbd6162578" providerId="LiveId" clId="{AE34F6A3-7111-4D1D-9D41-1048805A1372}" dt="2026-09-10T06:30:38.373" v="342" actId="14100"/>
+        <pc:chgData name="jeayong lee" userId="0e8205fbd6162578" providerId="LiveId" clId="{AE34F6A3-7111-4D1D-9D41-1048805A1372}" dt="2026-09-10T07:27:40.656" v="707" actId="20577"/>
         <pc:sldMkLst>
           <pc:docMk/>
           <pc:sldMk cId="0" sldId="268"/>
@@ -711,6 +742,14 @@
             <ac:spMk id="17" creationId="{00000000-0000-0000-0000-000000000000}"/>
           </ac:spMkLst>
         </pc:spChg>
+        <pc:spChg chg="add del mod">
+          <ac:chgData name="jeayong lee" userId="0e8205fbd6162578" providerId="LiveId" clId="{AE34F6A3-7111-4D1D-9D41-1048805A1372}" dt="2026-09-10T07:25:27.485" v="648" actId="478"/>
+          <ac:spMkLst>
+            <pc:docMk/>
+            <pc:sldMk cId="0" sldId="268"/>
+            <ac:spMk id="17" creationId="{6CEEFB73-49BD-831B-B9AC-64EC17E82812}"/>
+          </ac:spMkLst>
+        </pc:spChg>
         <pc:spChg chg="del">
           <ac:chgData name="jeayong lee" userId="0e8205fbd6162578" providerId="LiveId" clId="{AE34F6A3-7111-4D1D-9D41-1048805A1372}" dt="2026-09-10T06:24:25.923" v="244" actId="478"/>
           <ac:spMkLst>
@@ -727,6 +766,14 @@
             <ac:spMk id="19" creationId="{00000000-0000-0000-0000-000000000000}"/>
           </ac:spMkLst>
         </pc:spChg>
+        <pc:spChg chg="add del mod">
+          <ac:chgData name="jeayong lee" userId="0e8205fbd6162578" providerId="LiveId" clId="{AE34F6A3-7111-4D1D-9D41-1048805A1372}" dt="2026-09-10T07:25:27.485" v="648" actId="478"/>
+          <ac:spMkLst>
+            <pc:docMk/>
+            <pc:sldMk cId="0" sldId="268"/>
+            <ac:spMk id="19" creationId="{7E64AF39-0091-2A83-F512-E623F08E5937}"/>
+          </ac:spMkLst>
+        </pc:spChg>
         <pc:spChg chg="del">
           <ac:chgData name="jeayong lee" userId="0e8205fbd6162578" providerId="LiveId" clId="{AE34F6A3-7111-4D1D-9D41-1048805A1372}" dt="2026-09-10T06:24:29.833" v="249" actId="478"/>
           <ac:spMkLst>
@@ -741,6 +788,14 @@
             <pc:docMk/>
             <pc:sldMk cId="0" sldId="268"/>
             <ac:spMk id="21" creationId="{00000000-0000-0000-0000-000000000000}"/>
+          </ac:spMkLst>
+        </pc:spChg>
+        <pc:spChg chg="add del mod">
+          <ac:chgData name="jeayong lee" userId="0e8205fbd6162578" providerId="LiveId" clId="{AE34F6A3-7111-4D1D-9D41-1048805A1372}" dt="2026-09-10T07:25:27.485" v="648" actId="478"/>
+          <ac:spMkLst>
+            <pc:docMk/>
+            <pc:sldMk cId="0" sldId="268"/>
+            <ac:spMk id="21" creationId="{2E91333A-DC41-5177-A1A4-70A3767366C2}"/>
           </ac:spMkLst>
         </pc:spChg>
         <pc:spChg chg="del">
@@ -767,6 +822,14 @@
             <ac:spMk id="24" creationId="{00000000-0000-0000-0000-000000000000}"/>
           </ac:spMkLst>
         </pc:spChg>
+        <pc:spChg chg="del mod">
+          <ac:chgData name="jeayong lee" userId="0e8205fbd6162578" providerId="LiveId" clId="{AE34F6A3-7111-4D1D-9D41-1048805A1372}" dt="2026-09-10T07:26:41.146" v="694" actId="478"/>
+          <ac:spMkLst>
+            <pc:docMk/>
+            <pc:sldMk cId="0" sldId="268"/>
+            <ac:spMk id="24" creationId="{4B602FC7-0E52-FBD6-BB97-FBBA05EBA465}"/>
+          </ac:spMkLst>
+        </pc:spChg>
         <pc:spChg chg="del">
           <ac:chgData name="jeayong lee" userId="0e8205fbd6162578" providerId="LiveId" clId="{AE34F6A3-7111-4D1D-9D41-1048805A1372}" dt="2026-09-10T06:24:29.833" v="249" actId="478"/>
           <ac:spMkLst>
@@ -775,12 +838,28 @@
             <ac:spMk id="25" creationId="{00000000-0000-0000-0000-000000000000}"/>
           </ac:spMkLst>
         </pc:spChg>
+        <pc:spChg chg="mod">
+          <ac:chgData name="jeayong lee" userId="0e8205fbd6162578" providerId="LiveId" clId="{AE34F6A3-7111-4D1D-9D41-1048805A1372}" dt="2026-09-10T07:25:46.495" v="650"/>
+          <ac:spMkLst>
+            <pc:docMk/>
+            <pc:sldMk cId="0" sldId="268"/>
+            <ac:spMk id="25" creationId="{A3C75CB9-E9F7-806D-53A4-567B06524865}"/>
+          </ac:spMkLst>
+        </pc:spChg>
         <pc:spChg chg="del">
           <ac:chgData name="jeayong lee" userId="0e8205fbd6162578" providerId="LiveId" clId="{AE34F6A3-7111-4D1D-9D41-1048805A1372}" dt="2026-09-10T06:24:29.833" v="249" actId="478"/>
           <ac:spMkLst>
             <pc:docMk/>
             <pc:sldMk cId="0" sldId="268"/>
             <ac:spMk id="26" creationId="{00000000-0000-0000-0000-000000000000}"/>
+          </ac:spMkLst>
+        </pc:spChg>
+        <pc:spChg chg="mod">
+          <ac:chgData name="jeayong lee" userId="0e8205fbd6162578" providerId="LiveId" clId="{AE34F6A3-7111-4D1D-9D41-1048805A1372}" dt="2026-09-10T07:26:25.065" v="685" actId="27636"/>
+          <ac:spMkLst>
+            <pc:docMk/>
+            <pc:sldMk cId="0" sldId="268"/>
+            <ac:spMk id="26" creationId="{C9BE8E57-C270-3392-1304-1FAE8842853B}"/>
           </ac:spMkLst>
         </pc:spChg>
         <pc:spChg chg="mod">
@@ -839,12 +918,28 @@
             <ac:spMk id="34" creationId="{00000000-0000-0000-0000-000000000000}"/>
           </ac:spMkLst>
         </pc:spChg>
+        <pc:spChg chg="mod">
+          <ac:chgData name="jeayong lee" userId="0e8205fbd6162578" providerId="LiveId" clId="{AE34F6A3-7111-4D1D-9D41-1048805A1372}" dt="2026-09-10T07:27:40.656" v="707" actId="20577"/>
+          <ac:spMkLst>
+            <pc:docMk/>
+            <pc:sldMk cId="0" sldId="268"/>
+            <ac:spMk id="34" creationId="{A8DCC672-E9B0-2A11-25E7-913C9651BA07}"/>
+          </ac:spMkLst>
+        </pc:spChg>
         <pc:spChg chg="del">
           <ac:chgData name="jeayong lee" userId="0e8205fbd6162578" providerId="LiveId" clId="{AE34F6A3-7111-4D1D-9D41-1048805A1372}" dt="2026-09-10T06:24:45.184" v="252" actId="478"/>
           <ac:spMkLst>
             <pc:docMk/>
             <pc:sldMk cId="0" sldId="268"/>
             <ac:spMk id="35" creationId="{00000000-0000-0000-0000-000000000000}"/>
+          </ac:spMkLst>
+        </pc:spChg>
+        <pc:spChg chg="mod">
+          <ac:chgData name="jeayong lee" userId="0e8205fbd6162578" providerId="LiveId" clId="{AE34F6A3-7111-4D1D-9D41-1048805A1372}" dt="2026-09-10T07:27:02.445" v="699"/>
+          <ac:spMkLst>
+            <pc:docMk/>
+            <pc:sldMk cId="0" sldId="268"/>
+            <ac:spMk id="35" creationId="{4AEA90C7-42DA-E474-6AAC-10D42842961A}"/>
           </ac:spMkLst>
         </pc:spChg>
         <pc:spChg chg="del">
@@ -855,12 +950,28 @@
             <ac:spMk id="36" creationId="{00000000-0000-0000-0000-000000000000}"/>
           </ac:spMkLst>
         </pc:spChg>
+        <pc:spChg chg="mod">
+          <ac:chgData name="jeayong lee" userId="0e8205fbd6162578" providerId="LiveId" clId="{AE34F6A3-7111-4D1D-9D41-1048805A1372}" dt="2026-09-10T07:27:02.445" v="699"/>
+          <ac:spMkLst>
+            <pc:docMk/>
+            <pc:sldMk cId="0" sldId="268"/>
+            <ac:spMk id="36" creationId="{18994DF9-5B23-F06D-BE5D-67E4595F1009}"/>
+          </ac:spMkLst>
+        </pc:spChg>
         <pc:spChg chg="del">
           <ac:chgData name="jeayong lee" userId="0e8205fbd6162578" providerId="LiveId" clId="{AE34F6A3-7111-4D1D-9D41-1048805A1372}" dt="2026-09-10T06:24:45.184" v="252" actId="478"/>
           <ac:spMkLst>
             <pc:docMk/>
             <pc:sldMk cId="0" sldId="268"/>
             <ac:spMk id="37" creationId="{00000000-0000-0000-0000-000000000000}"/>
+          </ac:spMkLst>
+        </pc:spChg>
+        <pc:spChg chg="mod">
+          <ac:chgData name="jeayong lee" userId="0e8205fbd6162578" providerId="LiveId" clId="{AE34F6A3-7111-4D1D-9D41-1048805A1372}" dt="2026-09-10T07:27:23.405" v="702"/>
+          <ac:spMkLst>
+            <pc:docMk/>
+            <pc:sldMk cId="0" sldId="268"/>
+            <ac:spMk id="37" creationId="{E4084BC1-0894-EF15-2F2F-E191DD9F2AAA}"/>
           </ac:spMkLst>
         </pc:spChg>
         <pc:spChg chg="del">
@@ -880,7 +991,7 @@
           </ac:spMkLst>
         </pc:spChg>
         <pc:spChg chg="add mod">
-          <ac:chgData name="jeayong lee" userId="0e8205fbd6162578" providerId="LiveId" clId="{AE34F6A3-7111-4D1D-9D41-1048805A1372}" dt="2026-09-10T06:30:32.063" v="340" actId="1076"/>
+          <ac:chgData name="jeayong lee" userId="0e8205fbd6162578" providerId="LiveId" clId="{AE34F6A3-7111-4D1D-9D41-1048805A1372}" dt="2026-09-10T07:26:08.531" v="658" actId="14100"/>
           <ac:spMkLst>
             <pc:docMk/>
             <pc:sldMk cId="0" sldId="268"/>
@@ -888,7 +999,7 @@
           </ac:spMkLst>
         </pc:spChg>
         <pc:spChg chg="add mod">
-          <ac:chgData name="jeayong lee" userId="0e8205fbd6162578" providerId="LiveId" clId="{AE34F6A3-7111-4D1D-9D41-1048805A1372}" dt="2026-09-10T06:30:32.063" v="340" actId="1076"/>
+          <ac:chgData name="jeayong lee" userId="0e8205fbd6162578" providerId="LiveId" clId="{AE34F6A3-7111-4D1D-9D41-1048805A1372}" dt="2026-09-10T07:25:44.635" v="649" actId="164"/>
           <ac:spMkLst>
             <pc:docMk/>
             <pc:sldMk cId="0" sldId="268"/>
@@ -896,7 +1007,7 @@
           </ac:spMkLst>
         </pc:spChg>
         <pc:spChg chg="add mod">
-          <ac:chgData name="jeayong lee" userId="0e8205fbd6162578" providerId="LiveId" clId="{AE34F6A3-7111-4D1D-9D41-1048805A1372}" dt="2026-09-10T06:30:32.063" v="340" actId="1076"/>
+          <ac:chgData name="jeayong lee" userId="0e8205fbd6162578" providerId="LiveId" clId="{AE34F6A3-7111-4D1D-9D41-1048805A1372}" dt="2026-09-10T07:27:00.465" v="698" actId="27636"/>
           <ac:spMkLst>
             <pc:docMk/>
             <pc:sldMk cId="0" sldId="268"/>
@@ -904,7 +1015,7 @@
           </ac:spMkLst>
         </pc:spChg>
         <pc:spChg chg="add mod">
-          <ac:chgData name="jeayong lee" userId="0e8205fbd6162578" providerId="LiveId" clId="{AE34F6A3-7111-4D1D-9D41-1048805A1372}" dt="2026-09-10T06:30:32.063" v="340" actId="1076"/>
+          <ac:chgData name="jeayong lee" userId="0e8205fbd6162578" providerId="LiveId" clId="{AE34F6A3-7111-4D1D-9D41-1048805A1372}" dt="2026-09-10T07:27:00.445" v="697" actId="164"/>
           <ac:spMkLst>
             <pc:docMk/>
             <pc:sldMk cId="0" sldId="268"/>
@@ -919,9 +1030,49 @@
             <ac:spMk id="48" creationId="{87C5786B-D574-F32A-7C9E-6CFBED6A942C}"/>
           </ac:spMkLst>
         </pc:spChg>
+        <pc:grpChg chg="add mod">
+          <ac:chgData name="jeayong lee" userId="0e8205fbd6162578" providerId="LiveId" clId="{AE34F6A3-7111-4D1D-9D41-1048805A1372}" dt="2026-09-10T07:27:00.445" v="697" actId="164"/>
+          <ac:grpSpMkLst>
+            <pc:docMk/>
+            <pc:sldMk cId="0" sldId="268"/>
+            <ac:grpSpMk id="22" creationId="{D5D8DB0B-88AE-5F83-0E81-3761191E5F33}"/>
+          </ac:grpSpMkLst>
+        </pc:grpChg>
+        <pc:grpChg chg="add del mod">
+          <ac:chgData name="jeayong lee" userId="0e8205fbd6162578" providerId="LiveId" clId="{AE34F6A3-7111-4D1D-9D41-1048805A1372}" dt="2026-09-10T07:26:43.222" v="695" actId="478"/>
+          <ac:grpSpMkLst>
+            <pc:docMk/>
+            <pc:sldMk cId="0" sldId="268"/>
+            <ac:grpSpMk id="23" creationId="{F8B0406D-A75F-BE3C-E9E1-C5ED12B3D431}"/>
+          </ac:grpSpMkLst>
+        </pc:grpChg>
+        <pc:grpChg chg="add mod">
+          <ac:chgData name="jeayong lee" userId="0e8205fbd6162578" providerId="LiveId" clId="{AE34F6A3-7111-4D1D-9D41-1048805A1372}" dt="2026-09-10T07:27:00.445" v="697" actId="164"/>
+          <ac:grpSpMkLst>
+            <pc:docMk/>
+            <pc:sldMk cId="0" sldId="268"/>
+            <ac:grpSpMk id="31" creationId="{91A0E5F2-5C1A-8003-6EE4-0D5CD34E1D02}"/>
+          </ac:grpSpMkLst>
+        </pc:grpChg>
+        <pc:grpChg chg="add mod">
+          <ac:chgData name="jeayong lee" userId="0e8205fbd6162578" providerId="LiveId" clId="{AE34F6A3-7111-4D1D-9D41-1048805A1372}" dt="2026-09-10T07:27:15.865" v="700" actId="1076"/>
+          <ac:grpSpMkLst>
+            <pc:docMk/>
+            <pc:sldMk cId="0" sldId="268"/>
+            <ac:grpSpMk id="32" creationId="{0CDF9658-497E-B664-9283-F3F8513302F1}"/>
+          </ac:grpSpMkLst>
+        </pc:grpChg>
+        <pc:grpChg chg="mod">
+          <ac:chgData name="jeayong lee" userId="0e8205fbd6162578" providerId="LiveId" clId="{AE34F6A3-7111-4D1D-9D41-1048805A1372}" dt="2026-09-10T07:27:02.445" v="699"/>
+          <ac:grpSpMkLst>
+            <pc:docMk/>
+            <pc:sldMk cId="0" sldId="268"/>
+            <ac:grpSpMk id="33" creationId="{16EFED4F-6AD9-9AEF-7A1A-E637BF542102}"/>
+          </ac:grpSpMkLst>
+        </pc:grpChg>
       </pc:sldChg>
       <pc:sldChg chg="addSp delSp modSp mod">
-        <pc:chgData name="jeayong lee" userId="0e8205fbd6162578" providerId="LiveId" clId="{AE34F6A3-7111-4D1D-9D41-1048805A1372}" dt="2026-09-10T06:51:18.573" v="431" actId="14100"/>
+        <pc:chgData name="jeayong lee" userId="0e8205fbd6162578" providerId="LiveId" clId="{AE34F6A3-7111-4D1D-9D41-1048805A1372}" dt="2026-09-10T07:34:55.293" v="759" actId="20577"/>
         <pc:sldMkLst>
           <pc:docMk/>
           <pc:sldMk cId="0" sldId="269"/>
@@ -932,6 +1083,14 @@
             <pc:docMk/>
             <pc:sldMk cId="0" sldId="269"/>
             <ac:spMk id="3" creationId="{00000000-0000-0000-0000-000000000000}"/>
+          </ac:spMkLst>
+        </pc:spChg>
+        <pc:spChg chg="mod">
+          <ac:chgData name="jeayong lee" userId="0e8205fbd6162578" providerId="LiveId" clId="{AE34F6A3-7111-4D1D-9D41-1048805A1372}" dt="2026-09-10T07:28:07.537" v="709"/>
+          <ac:spMkLst>
+            <pc:docMk/>
+            <pc:sldMk cId="0" sldId="269"/>
+            <ac:spMk id="9" creationId="{00000000-0000-0000-0000-000000000000}"/>
           </ac:spMkLst>
         </pc:spChg>
         <pc:spChg chg="del">
@@ -1055,7 +1214,7 @@
           </ac:spMkLst>
         </pc:spChg>
         <pc:spChg chg="mod">
-          <ac:chgData name="jeayong lee" userId="0e8205fbd6162578" providerId="LiveId" clId="{AE34F6A3-7111-4D1D-9D41-1048805A1372}" dt="2026-09-10T06:50:41.123" v="412" actId="20577"/>
+          <ac:chgData name="jeayong lee" userId="0e8205fbd6162578" providerId="LiveId" clId="{AE34F6A3-7111-4D1D-9D41-1048805A1372}" dt="2026-09-10T07:34:55.293" v="759" actId="20577"/>
           <ac:spMkLst>
             <pc:docMk/>
             <pc:sldMk cId="0" sldId="269"/>
@@ -1335,11 +1494,35 @@
         </pc:graphicFrameChg>
       </pc:sldChg>
       <pc:sldChg chg="modSp mod">
-        <pc:chgData name="jeayong lee" userId="0e8205fbd6162578" providerId="LiveId" clId="{AE34F6A3-7111-4D1D-9D41-1048805A1372}" dt="2026-09-10T06:58:29.933" v="509" actId="14100"/>
+        <pc:chgData name="jeayong lee" userId="0e8205fbd6162578" providerId="LiveId" clId="{AE34F6A3-7111-4D1D-9D41-1048805A1372}" dt="2026-09-10T07:36:15.816" v="774" actId="1076"/>
         <pc:sldMkLst>
           <pc:docMk/>
           <pc:sldMk cId="0" sldId="272"/>
         </pc:sldMkLst>
+        <pc:spChg chg="mod">
+          <ac:chgData name="jeayong lee" userId="0e8205fbd6162578" providerId="LiveId" clId="{AE34F6A3-7111-4D1D-9D41-1048805A1372}" dt="2026-09-10T07:36:15.816" v="774" actId="1076"/>
+          <ac:spMkLst>
+            <pc:docMk/>
+            <pc:sldMk cId="0" sldId="272"/>
+            <ac:spMk id="2" creationId="{00000000-0000-0000-0000-000000000000}"/>
+          </ac:spMkLst>
+        </pc:spChg>
+        <pc:spChg chg="mod">
+          <ac:chgData name="jeayong lee" userId="0e8205fbd6162578" providerId="LiveId" clId="{AE34F6A3-7111-4D1D-9D41-1048805A1372}" dt="2026-09-10T07:36:15.445" v="773" actId="14100"/>
+          <ac:spMkLst>
+            <pc:docMk/>
+            <pc:sldMk cId="0" sldId="272"/>
+            <ac:spMk id="3" creationId="{00000000-0000-0000-0000-000000000000}"/>
+          </ac:spMkLst>
+        </pc:spChg>
+        <pc:spChg chg="mod">
+          <ac:chgData name="jeayong lee" userId="0e8205fbd6162578" providerId="LiveId" clId="{AE34F6A3-7111-4D1D-9D41-1048805A1372}" dt="2026-09-10T07:30:04.345" v="716"/>
+          <ac:spMkLst>
+            <pc:docMk/>
+            <pc:sldMk cId="0" sldId="272"/>
+            <ac:spMk id="14" creationId="{00000000-0000-0000-0000-000000000000}"/>
+          </ac:spMkLst>
+        </pc:spChg>
         <pc:spChg chg="mod">
           <ac:chgData name="jeayong lee" userId="0e8205fbd6162578" providerId="LiveId" clId="{AE34F6A3-7111-4D1D-9D41-1048805A1372}" dt="2026-09-10T06:58:21.153" v="506" actId="14100"/>
           <ac:spMkLst>
@@ -1349,7 +1532,7 @@
           </ac:spMkLst>
         </pc:spChg>
         <pc:spChg chg="mod">
-          <ac:chgData name="jeayong lee" userId="0e8205fbd6162578" providerId="LiveId" clId="{AE34F6A3-7111-4D1D-9D41-1048805A1372}" dt="2026-09-10T06:58:23.796" v="507" actId="14100"/>
+          <ac:chgData name="jeayong lee" userId="0e8205fbd6162578" providerId="LiveId" clId="{AE34F6A3-7111-4D1D-9D41-1048805A1372}" dt="2026-09-10T07:30:33.375" v="718"/>
           <ac:spMkLst>
             <pc:docMk/>
             <pc:sldMk cId="0" sldId="272"/>
@@ -1370,6 +1553,14 @@
             <pc:docMk/>
             <pc:sldMk cId="0" sldId="272"/>
             <ac:spMk id="30" creationId="{00000000-0000-0000-0000-000000000000}"/>
+          </ac:spMkLst>
+        </pc:spChg>
+        <pc:spChg chg="mod">
+          <ac:chgData name="jeayong lee" userId="0e8205fbd6162578" providerId="LiveId" clId="{AE34F6A3-7111-4D1D-9D41-1048805A1372}" dt="2026-09-10T07:36:10.465" v="771" actId="1076"/>
+          <ac:spMkLst>
+            <pc:docMk/>
+            <pc:sldMk cId="0" sldId="272"/>
+            <ac:spMk id="32" creationId="{00000000-0000-0000-0000-000000000000}"/>
           </ac:spMkLst>
         </pc:spChg>
       </pc:sldChg>
@@ -4093,7 +4284,7 @@
         </p:nvSpPr>
         <p:spPr>
           <a:xfrm>
-            <a:off x="9372600" y="6565392"/>
+            <a:off x="9372600" y="6345937"/>
             <a:ext cx="2240280" cy="128016"/>
           </a:xfrm>
           <a:prstGeom prst="rect">
@@ -4563,8 +4754,8 @@
         </p:nvSpPr>
         <p:spPr>
           <a:xfrm>
-            <a:off x="9372600" y="6565392"/>
-            <a:ext cx="2240280" cy="128016"/>
+            <a:off x="9372600" y="6198162"/>
+            <a:ext cx="2240280" cy="320040"/>
           </a:xfrm>
           <a:prstGeom prst="rect">
             <a:avLst/>
@@ -8846,8 +9037,8 @@
           </a:p>
         </p:txBody>
       </p:sp>
-      <mc:AlternateContent xmlns:mc="http://schemas.openxmlformats.org/markup-compatibility/2006">
-        <mc:Choice xmlns:a14="http://schemas.microsoft.com/office/drawing/2010/main" Requires="a14">
+      <mc:AlternateContent xmlns:mc="http://schemas.openxmlformats.org/markup-compatibility/2006" xmlns:a14="http://schemas.microsoft.com/office/drawing/2010/main">
+        <mc:Choice Requires="a14">
           <p:sp>
             <p:nvSpPr>
               <p:cNvPr id="30" name="Text 28"/>
@@ -8924,6 +9115,7 @@
                 <a:endParaRPr lang="en-US" altLang="ko-KR" sz="2000" dirty="0"/>
               </a:p>
               <a:p>
+                <a:pPr/>
                 <a14:m>
                   <m:oMathPara xmlns:m="http://schemas.openxmlformats.org/officeDocument/2006/math">
                     <m:oMath>
@@ -8942,7 +9134,7 @@
                       <m:f>
                         <m:fPr>
                           <m:ctrlPr>
-                            <a:rPr lang="en-US" altLang="ko-KR" sz="2000" i="1" dirty="0">
+                            <a:rPr lang="ko-KR" altLang="en-US" sz="2000" i="1" dirty="0">
                               <a:latin typeface="Cambria Math" panose="02040503050406030204" pitchFamily="18" charset="0"/>
                             </a:rPr>
                           </m:ctrlPr>
@@ -9072,7 +9264,7 @@
             </p:txBody>
           </p:sp>
         </mc:Choice>
-        <mc:Fallback>
+        <mc:Fallback xmlns="">
           <p:sp>
             <p:nvSpPr>
               <p:cNvPr id="30" name="Text 28"/>
@@ -9112,192 +9304,466 @@
           </p:sp>
         </mc:Fallback>
       </mc:AlternateContent>
-      <p:sp>
-        <p:nvSpPr>
-          <p:cNvPr id="41" name="Shape 25">
+      <p:grpSp>
+        <p:nvGrpSpPr>
+          <p:cNvPr id="31" name="그룹 30">
             <a:extLst>
               <a:ext uri="{FF2B5EF4-FFF2-40B4-BE49-F238E27FC236}">
-                <a16:creationId xmlns:a16="http://schemas.microsoft.com/office/drawing/2014/main" id="{D771ADCC-6E95-084D-6BD3-E6C7FB81DA23}"/>
+                <a16:creationId xmlns:a16="http://schemas.microsoft.com/office/drawing/2014/main" id="{91A0E5F2-5C1A-8003-6EE4-0D5CD34E1D02}"/>
               </a:ext>
             </a:extLst>
           </p:cNvPr>
-          <p:cNvSpPr/>
-          <p:nvPr/>
-        </p:nvSpPr>
-        <p:spPr>
-          <a:xfrm>
-            <a:off x="7726680" y="1828800"/>
-            <a:ext cx="3383280" cy="3611880"/>
-          </a:xfrm>
-          <a:prstGeom prst="rect">
-            <a:avLst/>
-          </a:prstGeom>
-          <a:solidFill>
-            <a:srgbClr val="F5F8FA"/>
-          </a:solidFill>
-          <a:ln w="12700">
-            <a:solidFill>
-              <a:srgbClr val="BFCBD6"/>
-            </a:solidFill>
-            <a:prstDash val="solid"/>
-          </a:ln>
-        </p:spPr>
-        <p:txBody>
-          <a:bodyPr/>
-          <a:lstStyle/>
-          <a:p>
-            <a:endParaRPr sz="2800"/>
-          </a:p>
-        </p:txBody>
-      </p:sp>
-      <p:sp>
-        <p:nvSpPr>
-          <p:cNvPr id="43" name="Shape 26">
+          <p:cNvGrpSpPr/>
+          <p:nvPr/>
+        </p:nvGrpSpPr>
+        <p:grpSpPr>
+          <a:xfrm>
+            <a:off x="7726680" y="1828801"/>
+            <a:ext cx="3383280" cy="1755279"/>
+            <a:chOff x="7726680" y="1828801"/>
+            <a:chExt cx="3383280" cy="1755279"/>
+          </a:xfrm>
+        </p:grpSpPr>
+        <p:grpSp>
+          <p:nvGrpSpPr>
+            <p:cNvPr id="22" name="그룹 21">
+              <a:extLst>
+                <a:ext uri="{FF2B5EF4-FFF2-40B4-BE49-F238E27FC236}">
+                  <a16:creationId xmlns:a16="http://schemas.microsoft.com/office/drawing/2014/main" id="{D5D8DB0B-88AE-5F83-0E81-3761191E5F33}"/>
+                </a:ext>
+              </a:extLst>
+            </p:cNvPr>
+            <p:cNvGrpSpPr/>
+            <p:nvPr/>
+          </p:nvGrpSpPr>
+          <p:grpSpPr>
+            <a:xfrm>
+              <a:off x="7726680" y="1828801"/>
+              <a:ext cx="3383280" cy="1755279"/>
+              <a:chOff x="7726680" y="1828800"/>
+              <a:chExt cx="3383280" cy="1864593"/>
+            </a:xfrm>
+          </p:grpSpPr>
+          <p:sp>
+            <p:nvSpPr>
+              <p:cNvPr id="41" name="Shape 25">
+                <a:extLst>
+                  <a:ext uri="{FF2B5EF4-FFF2-40B4-BE49-F238E27FC236}">
+                    <a16:creationId xmlns:a16="http://schemas.microsoft.com/office/drawing/2014/main" id="{D771ADCC-6E95-084D-6BD3-E6C7FB81DA23}"/>
+                  </a:ext>
+                </a:extLst>
+              </p:cNvPr>
+              <p:cNvSpPr/>
+              <p:nvPr/>
+            </p:nvSpPr>
+            <p:spPr>
+              <a:xfrm>
+                <a:off x="7726680" y="1828800"/>
+                <a:ext cx="3383280" cy="1864593"/>
+              </a:xfrm>
+              <a:prstGeom prst="rect">
+                <a:avLst/>
+              </a:prstGeom>
+              <a:solidFill>
+                <a:srgbClr val="F5F8FA"/>
+              </a:solidFill>
+              <a:ln w="12700">
+                <a:solidFill>
+                  <a:srgbClr val="BFCBD6"/>
+                </a:solidFill>
+                <a:prstDash val="solid"/>
+              </a:ln>
+            </p:spPr>
+            <p:txBody>
+              <a:bodyPr/>
+              <a:lstStyle/>
+              <a:p>
+                <a:endParaRPr sz="2800"/>
+              </a:p>
+            </p:txBody>
+          </p:sp>
+          <p:sp>
+            <p:nvSpPr>
+              <p:cNvPr id="43" name="Shape 26">
+                <a:extLst>
+                  <a:ext uri="{FF2B5EF4-FFF2-40B4-BE49-F238E27FC236}">
+                    <a16:creationId xmlns:a16="http://schemas.microsoft.com/office/drawing/2014/main" id="{A62708ED-B2D6-5C4F-1949-548F271402FE}"/>
+                  </a:ext>
+                </a:extLst>
+              </p:cNvPr>
+              <p:cNvSpPr/>
+              <p:nvPr/>
+            </p:nvSpPr>
+            <p:spPr>
+              <a:xfrm>
+                <a:off x="7726680" y="1828800"/>
+                <a:ext cx="3383280" cy="329184"/>
+              </a:xfrm>
+              <a:prstGeom prst="rect">
+                <a:avLst/>
+              </a:prstGeom>
+              <a:solidFill>
+                <a:srgbClr val="23467B"/>
+              </a:solidFill>
+              <a:ln w="12700">
+                <a:solidFill>
+                  <a:srgbClr val="23467B"/>
+                </a:solidFill>
+                <a:prstDash val="solid"/>
+              </a:ln>
+            </p:spPr>
+            <p:txBody>
+              <a:bodyPr/>
+              <a:lstStyle/>
+              <a:p>
+                <a:endParaRPr sz="2800"/>
+              </a:p>
+            </p:txBody>
+          </p:sp>
+          <p:sp>
+            <p:nvSpPr>
+              <p:cNvPr id="45" name="Text 27">
+                <a:extLst>
+                  <a:ext uri="{FF2B5EF4-FFF2-40B4-BE49-F238E27FC236}">
+                    <a16:creationId xmlns:a16="http://schemas.microsoft.com/office/drawing/2014/main" id="{E2562B4D-C1C6-4849-A3B8-13E38B91C33A}"/>
+                  </a:ext>
+                </a:extLst>
+              </p:cNvPr>
+              <p:cNvSpPr/>
+              <p:nvPr/>
+            </p:nvSpPr>
+            <p:spPr>
+              <a:xfrm>
+                <a:off x="7781544" y="1879092"/>
+                <a:ext cx="3273552" cy="210312"/>
+              </a:xfrm>
+              <a:prstGeom prst="rect">
+                <a:avLst/>
+              </a:prstGeom>
+              <a:noFill/>
+              <a:ln/>
+            </p:spPr>
+            <p:txBody>
+              <a:bodyPr wrap="square" lIns="0" tIns="0" rIns="0" bIns="0" rtlCol="0" anchor="ctr">
+                <a:normAutofit fontScale="92500" lnSpcReduction="20000"/>
+              </a:bodyPr>
+              <a:lstStyle/>
+              <a:p>
+                <a:pPr marL="0" indent="0" algn="ctr">
+                  <a:buNone/>
+                </a:pPr>
+                <a:r>
+                  <a:rPr lang="ko-KR" altLang="en-US" sz="1600" b="1" dirty="0">
+                    <a:solidFill>
+                      <a:srgbClr val="FFFFFF"/>
+                    </a:solidFill>
+                    <a:latin typeface="Malgun Gothic" pitchFamily="34" charset="0"/>
+                    <a:ea typeface="Malgun Gothic" pitchFamily="34" charset="-122"/>
+                    <a:cs typeface="Malgun Gothic" pitchFamily="34" charset="-120"/>
+                  </a:rPr>
+                  <a:t>구간별 보조지표</a:t>
+                </a:r>
+                <a:endParaRPr lang="en-US" sz="1400" dirty="0"/>
+              </a:p>
+            </p:txBody>
+          </p:sp>
+        </p:grpSp>
+        <p:sp>
+          <p:nvSpPr>
+            <p:cNvPr id="47" name="Text 28">
+              <a:extLst>
+                <a:ext uri="{FF2B5EF4-FFF2-40B4-BE49-F238E27FC236}">
+                  <a16:creationId xmlns:a16="http://schemas.microsoft.com/office/drawing/2014/main" id="{47D0CC2C-6603-E0F0-2539-8531BC4E80DF}"/>
+                </a:ext>
+              </a:extLst>
+            </p:cNvPr>
+            <p:cNvSpPr/>
+            <p:nvPr/>
+          </p:nvSpPr>
+          <p:spPr>
+            <a:xfrm>
+              <a:off x="7854696" y="2304288"/>
+              <a:ext cx="3127248" cy="1279792"/>
+            </a:xfrm>
+            <a:prstGeom prst="rect">
+              <a:avLst/>
+            </a:prstGeom>
+            <a:noFill/>
+            <a:ln/>
+          </p:spPr>
+          <p:txBody>
+            <a:bodyPr wrap="square" lIns="254" tIns="254" rIns="254" bIns="254" rtlCol="0" anchor="t">
+              <a:normAutofit/>
+            </a:bodyPr>
+            <a:lstStyle/>
+            <a:p>
+              <a:pPr marL="342900" indent="-342900">
+                <a:buFont typeface="Arial" panose="020B0604020202020204" pitchFamily="34" charset="0"/>
+                <a:buChar char="•"/>
+              </a:pPr>
+              <a:r>
+                <a:rPr lang="ko-KR" altLang="ko-KR" sz="2000" b="1" dirty="0"/>
+                <a:t>유지구간 벌림 변동성</a:t>
+              </a:r>
+              <a:endParaRPr lang="en-US" altLang="ko-KR" sz="2000" b="1" dirty="0"/>
+            </a:p>
+            <a:p>
+              <a:pPr marL="342900" indent="-342900">
+                <a:buFont typeface="Arial" panose="020B0604020202020204" pitchFamily="34" charset="0"/>
+                <a:buChar char="•"/>
+              </a:pPr>
+              <a:r>
+                <a:rPr lang="ko-KR" altLang="ko-KR" sz="2000" b="1" dirty="0"/>
+                <a:t>해제구간 벌림 변화량/궤적</a:t>
+              </a:r>
+              <a:endParaRPr lang="en-US" altLang="ko-KR" sz="2000" b="1" dirty="0"/>
+            </a:p>
+            <a:p>
+              <a:pPr marL="342900" indent="-342900">
+                <a:buFont typeface="Arial" panose="020B0604020202020204" pitchFamily="34" charset="0"/>
+                <a:buChar char="•"/>
+              </a:pPr>
+              <a:r>
+                <a:rPr lang="ko-KR" altLang="ko-KR" sz="2000" b="1" dirty="0"/>
+                <a:t>준비/파지 형성 시간</a:t>
+              </a:r>
+              <a:endParaRPr lang="en-US" sz="2000" b="1" dirty="0"/>
+            </a:p>
+          </p:txBody>
+        </p:sp>
+      </p:grpSp>
+      <p:grpSp>
+        <p:nvGrpSpPr>
+          <p:cNvPr id="32" name="그룹 31">
             <a:extLst>
               <a:ext uri="{FF2B5EF4-FFF2-40B4-BE49-F238E27FC236}">
-                <a16:creationId xmlns:a16="http://schemas.microsoft.com/office/drawing/2014/main" id="{A62708ED-B2D6-5C4F-1949-548F271402FE}"/>
+                <a16:creationId xmlns:a16="http://schemas.microsoft.com/office/drawing/2014/main" id="{0CDF9658-497E-B664-9283-F3F8513302F1}"/>
               </a:ext>
             </a:extLst>
           </p:cNvPr>
-          <p:cNvSpPr/>
-          <p:nvPr/>
-        </p:nvSpPr>
-        <p:spPr>
-          <a:xfrm>
-            <a:off x="7726680" y="1828800"/>
-            <a:ext cx="3383280" cy="329184"/>
-          </a:xfrm>
-          <a:prstGeom prst="rect">
-            <a:avLst/>
-          </a:prstGeom>
-          <a:solidFill>
-            <a:srgbClr val="23467B"/>
-          </a:solidFill>
-          <a:ln w="12700">
-            <a:solidFill>
-              <a:srgbClr val="23467B"/>
-            </a:solidFill>
-            <a:prstDash val="solid"/>
-          </a:ln>
-        </p:spPr>
-        <p:txBody>
-          <a:bodyPr/>
-          <a:lstStyle/>
-          <a:p>
-            <a:endParaRPr sz="2800"/>
-          </a:p>
-        </p:txBody>
-      </p:sp>
-      <p:sp>
-        <p:nvSpPr>
-          <p:cNvPr id="45" name="Text 27">
-            <a:extLst>
-              <a:ext uri="{FF2B5EF4-FFF2-40B4-BE49-F238E27FC236}">
-                <a16:creationId xmlns:a16="http://schemas.microsoft.com/office/drawing/2014/main" id="{E2562B4D-C1C6-4849-A3B8-13E38B91C33A}"/>
-              </a:ext>
-            </a:extLst>
-          </p:cNvPr>
-          <p:cNvSpPr/>
-          <p:nvPr/>
-        </p:nvSpPr>
-        <p:spPr>
-          <a:xfrm>
-            <a:off x="7781544" y="1879092"/>
-            <a:ext cx="3273552" cy="210312"/>
-          </a:xfrm>
-          <a:prstGeom prst="rect">
-            <a:avLst/>
-          </a:prstGeom>
-          <a:noFill/>
-          <a:ln/>
-        </p:spPr>
-        <p:txBody>
-          <a:bodyPr wrap="square" lIns="0" tIns="0" rIns="0" bIns="0" rtlCol="0" anchor="ctr">
-            <a:normAutofit fontScale="92500" lnSpcReduction="10000"/>
-          </a:bodyPr>
-          <a:lstStyle/>
-          <a:p>
-            <a:pPr marL="0" indent="0" algn="ctr">
-              <a:buNone/>
-            </a:pPr>
-            <a:r>
-              <a:rPr lang="ko-KR" altLang="en-US" sz="1600" b="1" dirty="0">
-                <a:solidFill>
-                  <a:srgbClr val="FFFFFF"/>
-                </a:solidFill>
-                <a:latin typeface="Malgun Gothic" pitchFamily="34" charset="0"/>
-                <a:ea typeface="Malgun Gothic" pitchFamily="34" charset="-122"/>
-                <a:cs typeface="Malgun Gothic" pitchFamily="34" charset="-120"/>
-              </a:rPr>
-              <a:t>구간별 보조지표</a:t>
-            </a:r>
-            <a:endParaRPr lang="en-US" sz="1400" dirty="0"/>
-          </a:p>
-        </p:txBody>
-      </p:sp>
-      <p:sp>
-        <p:nvSpPr>
-          <p:cNvPr id="47" name="Text 28">
-            <a:extLst>
-              <a:ext uri="{FF2B5EF4-FFF2-40B4-BE49-F238E27FC236}">
-                <a16:creationId xmlns:a16="http://schemas.microsoft.com/office/drawing/2014/main" id="{47D0CC2C-6603-E0F0-2539-8531BC4E80DF}"/>
-              </a:ext>
-            </a:extLst>
-          </p:cNvPr>
-          <p:cNvSpPr/>
-          <p:nvPr/>
-        </p:nvSpPr>
-        <p:spPr>
-          <a:xfrm>
-            <a:off x="7854696" y="2304288"/>
-            <a:ext cx="3127248" cy="3017520"/>
-          </a:xfrm>
-          <a:prstGeom prst="rect">
-            <a:avLst/>
-          </a:prstGeom>
-          <a:noFill/>
-          <a:ln/>
-        </p:spPr>
-        <p:txBody>
-          <a:bodyPr wrap="square" lIns="254" tIns="254" rIns="254" bIns="254" rtlCol="0" anchor="t">
-            <a:normAutofit/>
-          </a:bodyPr>
-          <a:lstStyle/>
-          <a:p>
-            <a:pPr marL="342900" indent="-342900">
-              <a:buFont typeface="Arial" panose="020B0604020202020204" pitchFamily="34" charset="0"/>
-              <a:buChar char="•"/>
-            </a:pPr>
-            <a:r>
-              <a:rPr lang="ko-KR" altLang="ko-KR" sz="2400" b="1" dirty="0"/>
-              <a:t>유지구간 벌림 변동성</a:t>
-            </a:r>
-            <a:endParaRPr lang="en-US" altLang="ko-KR" sz="2400" b="1" dirty="0"/>
-          </a:p>
-          <a:p>
-            <a:pPr marL="342900" indent="-342900">
-              <a:buFont typeface="Arial" panose="020B0604020202020204" pitchFamily="34" charset="0"/>
-              <a:buChar char="•"/>
-            </a:pPr>
-            <a:r>
-              <a:rPr lang="ko-KR" altLang="ko-KR" sz="2400" b="1" dirty="0"/>
-              <a:t>해제구간 벌림 변화량/궤적</a:t>
-            </a:r>
-            <a:endParaRPr lang="en-US" altLang="ko-KR" sz="2400" b="1" dirty="0"/>
-          </a:p>
-          <a:p>
-            <a:pPr marL="342900" indent="-342900">
-              <a:buFont typeface="Arial" panose="020B0604020202020204" pitchFamily="34" charset="0"/>
-              <a:buChar char="•"/>
-            </a:pPr>
-            <a:r>
-              <a:rPr lang="ko-KR" altLang="ko-KR" sz="2400" b="1" dirty="0"/>
-              <a:t>준비/파지 형성 시간</a:t>
-            </a:r>
-            <a:endParaRPr lang="en-US" sz="2400" b="1" dirty="0"/>
-          </a:p>
-        </p:txBody>
-      </p:sp>
+          <p:cNvGrpSpPr/>
+          <p:nvPr/>
+        </p:nvGrpSpPr>
+        <p:grpSpPr>
+          <a:xfrm>
+            <a:off x="7726680" y="3679343"/>
+            <a:ext cx="3383280" cy="1755279"/>
+            <a:chOff x="7726680" y="1828801"/>
+            <a:chExt cx="3383280" cy="1755279"/>
+          </a:xfrm>
+        </p:grpSpPr>
+        <p:grpSp>
+          <p:nvGrpSpPr>
+            <p:cNvPr id="33" name="그룹 32">
+              <a:extLst>
+                <a:ext uri="{FF2B5EF4-FFF2-40B4-BE49-F238E27FC236}">
+                  <a16:creationId xmlns:a16="http://schemas.microsoft.com/office/drawing/2014/main" id="{16EFED4F-6AD9-9AEF-7A1A-E637BF542102}"/>
+                </a:ext>
+              </a:extLst>
+            </p:cNvPr>
+            <p:cNvGrpSpPr/>
+            <p:nvPr/>
+          </p:nvGrpSpPr>
+          <p:grpSpPr>
+            <a:xfrm>
+              <a:off x="7726680" y="1828801"/>
+              <a:ext cx="3383280" cy="1755279"/>
+              <a:chOff x="7726680" y="1828800"/>
+              <a:chExt cx="3383280" cy="1864593"/>
+            </a:xfrm>
+          </p:grpSpPr>
+          <p:sp>
+            <p:nvSpPr>
+              <p:cNvPr id="35" name="Shape 25">
+                <a:extLst>
+                  <a:ext uri="{FF2B5EF4-FFF2-40B4-BE49-F238E27FC236}">
+                    <a16:creationId xmlns:a16="http://schemas.microsoft.com/office/drawing/2014/main" id="{4AEA90C7-42DA-E474-6AAC-10D42842961A}"/>
+                  </a:ext>
+                </a:extLst>
+              </p:cNvPr>
+              <p:cNvSpPr/>
+              <p:nvPr/>
+            </p:nvSpPr>
+            <p:spPr>
+              <a:xfrm>
+                <a:off x="7726680" y="1828800"/>
+                <a:ext cx="3383280" cy="1864593"/>
+              </a:xfrm>
+              <a:prstGeom prst="rect">
+                <a:avLst/>
+              </a:prstGeom>
+              <a:solidFill>
+                <a:srgbClr val="F5F8FA"/>
+              </a:solidFill>
+              <a:ln w="12700">
+                <a:solidFill>
+                  <a:srgbClr val="BFCBD6"/>
+                </a:solidFill>
+                <a:prstDash val="solid"/>
+              </a:ln>
+            </p:spPr>
+            <p:txBody>
+              <a:bodyPr/>
+              <a:lstStyle/>
+              <a:p>
+                <a:endParaRPr sz="2800"/>
+              </a:p>
+            </p:txBody>
+          </p:sp>
+          <p:sp>
+            <p:nvSpPr>
+              <p:cNvPr id="36" name="Shape 26">
+                <a:extLst>
+                  <a:ext uri="{FF2B5EF4-FFF2-40B4-BE49-F238E27FC236}">
+                    <a16:creationId xmlns:a16="http://schemas.microsoft.com/office/drawing/2014/main" id="{18994DF9-5B23-F06D-BE5D-67E4595F1009}"/>
+                  </a:ext>
+                </a:extLst>
+              </p:cNvPr>
+              <p:cNvSpPr/>
+              <p:nvPr/>
+            </p:nvSpPr>
+            <p:spPr>
+              <a:xfrm>
+                <a:off x="7726680" y="1828800"/>
+                <a:ext cx="3383280" cy="329184"/>
+              </a:xfrm>
+              <a:prstGeom prst="rect">
+                <a:avLst/>
+              </a:prstGeom>
+              <a:solidFill>
+                <a:srgbClr val="23467B"/>
+              </a:solidFill>
+              <a:ln w="12700">
+                <a:solidFill>
+                  <a:srgbClr val="23467B"/>
+                </a:solidFill>
+                <a:prstDash val="solid"/>
+              </a:ln>
+            </p:spPr>
+            <p:txBody>
+              <a:bodyPr/>
+              <a:lstStyle/>
+              <a:p>
+                <a:endParaRPr sz="2800"/>
+              </a:p>
+            </p:txBody>
+          </p:sp>
+          <p:sp>
+            <p:nvSpPr>
+              <p:cNvPr id="37" name="Text 27">
+                <a:extLst>
+                  <a:ext uri="{FF2B5EF4-FFF2-40B4-BE49-F238E27FC236}">
+                    <a16:creationId xmlns:a16="http://schemas.microsoft.com/office/drawing/2014/main" id="{E4084BC1-0894-EF15-2F2F-E191DD9F2AAA}"/>
+                  </a:ext>
+                </a:extLst>
+              </p:cNvPr>
+              <p:cNvSpPr/>
+              <p:nvPr/>
+            </p:nvSpPr>
+            <p:spPr>
+              <a:xfrm>
+                <a:off x="7781544" y="1879092"/>
+                <a:ext cx="3273552" cy="210312"/>
+              </a:xfrm>
+              <a:prstGeom prst="rect">
+                <a:avLst/>
+              </a:prstGeom>
+              <a:noFill/>
+              <a:ln/>
+            </p:spPr>
+            <p:txBody>
+              <a:bodyPr wrap="square" lIns="0" tIns="0" rIns="0" bIns="0" rtlCol="0" anchor="ctr">
+                <a:normAutofit fontScale="92500" lnSpcReduction="20000"/>
+              </a:bodyPr>
+              <a:lstStyle/>
+              <a:p>
+                <a:pPr marL="0" indent="0" algn="ctr">
+                  <a:buNone/>
+                </a:pPr>
+                <a:r>
+                  <a:rPr lang="ko-KR" altLang="en-US" sz="1600" b="1" dirty="0">
+                    <a:solidFill>
+                      <a:srgbClr val="FFFFFF"/>
+                    </a:solidFill>
+                    <a:latin typeface="Malgun Gothic" pitchFamily="34" charset="0"/>
+                    <a:ea typeface="Malgun Gothic" pitchFamily="34" charset="-122"/>
+                    <a:cs typeface="Malgun Gothic" pitchFamily="34" charset="-120"/>
+                  </a:rPr>
+                  <a:t>측정품질</a:t>
+                </a:r>
+                <a:endParaRPr lang="en-US" sz="1400" dirty="0"/>
+              </a:p>
+            </p:txBody>
+          </p:sp>
+        </p:grpSp>
+        <p:sp>
+          <p:nvSpPr>
+            <p:cNvPr id="34" name="Text 28">
+              <a:extLst>
+                <a:ext uri="{FF2B5EF4-FFF2-40B4-BE49-F238E27FC236}">
+                  <a16:creationId xmlns:a16="http://schemas.microsoft.com/office/drawing/2014/main" id="{A8DCC672-E9B0-2A11-25E7-913C9651BA07}"/>
+                </a:ext>
+              </a:extLst>
+            </p:cNvPr>
+            <p:cNvSpPr/>
+            <p:nvPr/>
+          </p:nvSpPr>
+          <p:spPr>
+            <a:xfrm>
+              <a:off x="7854696" y="2304288"/>
+              <a:ext cx="3127248" cy="1279792"/>
+            </a:xfrm>
+            <a:prstGeom prst="rect">
+              <a:avLst/>
+            </a:prstGeom>
+            <a:noFill/>
+            <a:ln/>
+          </p:spPr>
+          <p:txBody>
+            <a:bodyPr wrap="square" lIns="254" tIns="254" rIns="254" bIns="254" rtlCol="0" anchor="t">
+              <a:normAutofit/>
+            </a:bodyPr>
+            <a:lstStyle/>
+            <a:p>
+              <a:pPr marL="342900" indent="-342900">
+                <a:buFont typeface="Arial" panose="020B0604020202020204" pitchFamily="34" charset="0"/>
+                <a:buChar char="•"/>
+              </a:pPr>
+              <a:r>
+                <a:rPr lang="ko-KR" altLang="en-US" sz="2000" b="1" dirty="0"/>
+                <a:t>유효 프레임 비율</a:t>
+              </a:r>
+              <a:endParaRPr lang="en-US" altLang="ko-KR" sz="2000" b="1" dirty="0"/>
+            </a:p>
+            <a:p>
+              <a:pPr marL="342900" indent="-342900">
+                <a:buFont typeface="Arial" panose="020B0604020202020204" pitchFamily="34" charset="0"/>
+                <a:buChar char="•"/>
+              </a:pPr>
+              <a:r>
+                <a:rPr lang="ko-KR" altLang="en-US" sz="2000" b="1" dirty="0"/>
+                <a:t>최대 </a:t>
+              </a:r>
+              <a:r>
+                <a:rPr lang="ko-KR" altLang="en-US" sz="2000" b="1" dirty="0" err="1"/>
+                <a:t>연속결측구간</a:t>
+              </a:r>
+              <a:endParaRPr lang="en-US" altLang="ko-KR" sz="2000" b="1" dirty="0"/>
+            </a:p>
+            <a:p>
+              <a:pPr marL="342900" indent="-342900">
+                <a:buFont typeface="Arial" panose="020B0604020202020204" pitchFamily="34" charset="0"/>
+                <a:buChar char="•"/>
+              </a:pPr>
+              <a:r>
+                <a:rPr lang="ko-KR" altLang="en-US" sz="2000" b="1" dirty="0"/>
+                <a:t>분석구간 유효성</a:t>
+              </a:r>
+              <a:endParaRPr lang="en-US" sz="2000" b="1" dirty="0"/>
+            </a:p>
+          </p:txBody>
+        </p:sp>
+      </p:grpSp>
     </p:spTree>
   </p:cSld>
   <p:clrMapOvr>
@@ -9615,7 +10081,29 @@
                 <a:ea typeface="Malgun Gothic" pitchFamily="34" charset="-122"/>
                 <a:cs typeface="Malgun Gothic" pitchFamily="34" charset="-120"/>
               </a:rPr>
-              <a:t>[ 모델 입력과 정답 ]</a:t>
+              <a:t>[</a:t>
+            </a:r>
+            <a:r>
+              <a:rPr lang="ko-KR" altLang="en-US" b="1" dirty="0">
+                <a:solidFill>
+                  <a:srgbClr val="FFFFFF"/>
+                </a:solidFill>
+                <a:latin typeface="Malgun Gothic" pitchFamily="34" charset="0"/>
+                <a:ea typeface="Malgun Gothic" pitchFamily="34" charset="-122"/>
+                <a:cs typeface="Malgun Gothic" pitchFamily="34" charset="-120"/>
+              </a:rPr>
+              <a:t>모델 입력과 출력</a:t>
+            </a:r>
+            <a:r>
+              <a:rPr lang="en-US" b="1" dirty="0">
+                <a:solidFill>
+                  <a:srgbClr val="FFFFFF"/>
+                </a:solidFill>
+                <a:latin typeface="Malgun Gothic" pitchFamily="34" charset="0"/>
+                <a:ea typeface="Malgun Gothic" pitchFamily="34" charset="-122"/>
+                <a:cs typeface="Malgun Gothic" pitchFamily="34" charset="-120"/>
+              </a:rPr>
+              <a:t>]</a:t>
             </a:r>
             <a:endParaRPr lang="en-US" sz="1600" dirty="0"/>
           </a:p>
@@ -10230,7 +10718,29 @@
                 <a:ea typeface="Malgun Gothic" pitchFamily="34" charset="-122"/>
                 <a:cs typeface="Malgun Gothic" pitchFamily="34" charset="-120"/>
               </a:rPr>
-              <a:t>유지 판정</a:t>
+              <a:t>유지</a:t>
+            </a:r>
+            <a:r>
+              <a:rPr lang="en-US" altLang="ko-KR" sz="1600" dirty="0">
+                <a:solidFill>
+                  <a:srgbClr val="28323D"/>
+                </a:solidFill>
+                <a:latin typeface="Malgun Gothic" pitchFamily="34" charset="0"/>
+                <a:ea typeface="Malgun Gothic" pitchFamily="34" charset="-122"/>
+                <a:cs typeface="Malgun Gothic" pitchFamily="34" charset="-120"/>
+              </a:rPr>
+              <a:t>·</a:t>
+            </a:r>
+            <a:r>
+              <a:rPr lang="ko-KR" altLang="en-US" sz="1600" dirty="0">
+                <a:solidFill>
+                  <a:srgbClr val="28323D"/>
+                </a:solidFill>
+                <a:latin typeface="Malgun Gothic" pitchFamily="34" charset="0"/>
+                <a:ea typeface="Malgun Gothic" pitchFamily="34" charset="-122"/>
+                <a:cs typeface="Malgun Gothic" pitchFamily="34" charset="-120"/>
+              </a:rPr>
+              <a:t>재개방판정</a:t>
             </a:r>
             <a:endParaRPr lang="en-US" sz="1200" dirty="0"/>
           </a:p>
@@ -10882,8 +11392,8 @@
         </p:nvSpPr>
         <p:spPr>
           <a:xfrm>
-            <a:off x="9372600" y="6565392"/>
-            <a:ext cx="2240280" cy="128016"/>
+            <a:off x="9033721" y="6114358"/>
+            <a:ext cx="2579159" cy="358125"/>
           </a:xfrm>
           <a:prstGeom prst="rect">
             <a:avLst/>
@@ -11734,8 +12244,8 @@
           </a:p>
         </p:txBody>
       </p:sp>
-      <mc:AlternateContent xmlns:mc="http://schemas.openxmlformats.org/markup-compatibility/2006">
-        <mc:Choice xmlns:a14="http://schemas.microsoft.com/office/drawing/2010/main" Requires="a14">
+      <mc:AlternateContent xmlns:mc="http://schemas.openxmlformats.org/markup-compatibility/2006" xmlns:a14="http://schemas.microsoft.com/office/drawing/2010/main">
+        <mc:Choice Requires="a14">
           <p:sp>
             <p:nvSpPr>
               <p:cNvPr id="33" name="Text 31"/>
@@ -11986,7 +12496,7 @@
             </p:txBody>
           </p:sp>
         </mc:Choice>
-        <mc:Fallback>
+        <mc:Fallback xmlns="">
           <p:sp>
             <p:nvSpPr>
               <p:cNvPr id="33" name="Text 31"/>
@@ -12026,8 +12536,8 @@
           </p:sp>
         </mc:Fallback>
       </mc:AlternateContent>
-      <mc:AlternateContent xmlns:mc="http://schemas.openxmlformats.org/markup-compatibility/2006">
-        <mc:Choice xmlns:a14="http://schemas.microsoft.com/office/drawing/2010/main" Requires="a14">
+      <mc:AlternateContent xmlns:mc="http://schemas.openxmlformats.org/markup-compatibility/2006" xmlns:a14="http://schemas.microsoft.com/office/drawing/2010/main">
+        <mc:Choice Requires="a14">
           <p:graphicFrame>
             <p:nvGraphicFramePr>
               <p:cNvPr id="34" name="표 33">
@@ -12140,8 +12650,32 @@
                             <a:buNone/>
                           </a:pPr>
                           <a:r>
-                            <a:rPr lang="ko-KR"/>
-                            <a:t>환자 15명 (trial 반복은 환자별 요약값으로 정리)</a:t>
+                            <a:rPr lang="ko-KR" dirty="0"/>
+                            <a:t>환자 15명 (</a:t>
+                          </a:r>
+                          <a:r>
+                            <a:rPr lang="ko-KR" dirty="0" err="1"/>
+                            <a:t>trial</a:t>
+                          </a:r>
+                          <a:r>
+                            <a:rPr lang="ko-KR" dirty="0"/>
+                            <a:t> 반복은 </a:t>
+                          </a:r>
+                          <a:r>
+                            <a:rPr lang="ko-KR" dirty="0" err="1"/>
+                            <a:t>환자별</a:t>
+                          </a:r>
+                          <a:r>
+                            <a:rPr lang="ko-KR" dirty="0"/>
+                            <a:t> </a:t>
+                          </a:r>
+                          <a:r>
+                            <a:rPr lang="ko-KR" dirty="0" err="1"/>
+                            <a:t>요약값으로</a:t>
+                          </a:r>
+                          <a:r>
+                            <a:rPr lang="ko-KR" dirty="0"/>
+                            <a:t> 정리)</a:t>
                           </a:r>
                         </a:p>
                       </a:txBody>
@@ -12244,10 +12778,10 @@
                             <a:buNone/>
                           </a:pPr>
                           <a:r>
-                            <a:rPr lang="ko-KR" b="1"/>
+                            <a:rPr lang="ko-KR" b="1" dirty="0"/>
                             <a:t>오차 계산</a:t>
                           </a:r>
-                          <a:endParaRPr lang="ko-KR"/>
+                          <a:endParaRPr lang="ko-KR" dirty="0"/>
                         </a:p>
                       </a:txBody>
                       <a:tcPr/>
@@ -12292,10 +12826,10 @@
                             <a:buNone/>
                           </a:pPr>
                           <a:r>
-                            <a:rPr lang="ko-KR" b="1"/>
+                            <a:rPr lang="ko-KR" b="1" dirty="0"/>
                             <a:t>1차 지표</a:t>
                           </a:r>
-                          <a:endParaRPr lang="ko-KR"/>
+                          <a:endParaRPr lang="ko-KR" dirty="0"/>
                         </a:p>
                       </a:txBody>
                       <a:tcPr/>
@@ -12531,7 +13065,7 @@
             </a:graphic>
           </p:graphicFrame>
         </mc:Choice>
-        <mc:Fallback>
+        <mc:Fallback xmlns="">
           <p:graphicFrame>
             <p:nvGraphicFramePr>
               <p:cNvPr id="34" name="표 33">
@@ -12907,7 +13441,7 @@
         </p:nvSpPr>
         <p:spPr>
           <a:xfrm>
-            <a:off x="438912" y="6519672"/>
+            <a:off x="411480" y="6519672"/>
             <a:ext cx="11292840" cy="0"/>
           </a:xfrm>
           <a:prstGeom prst="line">
@@ -12937,8 +13471,8 @@
         </p:nvSpPr>
         <p:spPr>
           <a:xfrm>
-            <a:off x="9372600" y="6565392"/>
-            <a:ext cx="2240280" cy="128016"/>
+            <a:off x="8836137" y="5950492"/>
+            <a:ext cx="2776743" cy="742916"/>
           </a:xfrm>
           <a:prstGeom prst="rect">
             <a:avLst/>
@@ -13583,7 +14117,7 @@
               <a:buNone/>
             </a:pPr>
             <a:r>
-              <a:rPr lang="en-US" sz="2400" b="1" dirty="0">
+              <a:rPr lang="ko-KR" altLang="en-US" sz="2400" b="1" dirty="0">
                 <a:solidFill>
                   <a:srgbClr val="5F6771"/>
                 </a:solidFill>
@@ -13591,7 +14125,7 @@
                 <a:ea typeface="Malgun Gothic" pitchFamily="34" charset="-122"/>
                 <a:cs typeface="Malgun Gothic" pitchFamily="34" charset="-120"/>
               </a:rPr>
-              <a:t>추가 context 이득 제한</a:t>
+              <a:t>추가정보의 실질적 이득이 제한적</a:t>
             </a:r>
             <a:endParaRPr lang="en-US" dirty="0"/>
           </a:p>
@@ -14012,8 +14546,8 @@
         </p:nvSpPr>
         <p:spPr>
           <a:xfrm>
-            <a:off x="1965960" y="5715000"/>
-            <a:ext cx="8229600" cy="256032"/>
+            <a:off x="822960" y="5513832"/>
+            <a:ext cx="10607040" cy="565593"/>
           </a:xfrm>
           <a:prstGeom prst="rect">
             <a:avLst/>
@@ -14023,7 +14557,7 @@
         </p:spPr>
         <p:txBody>
           <a:bodyPr wrap="square" lIns="0" tIns="0" rIns="0" bIns="0" rtlCol="0" anchor="ctr">
-            <a:normAutofit fontScale="92500"/>
+            <a:normAutofit/>
           </a:bodyPr>
           <a:lstStyle/>
           <a:p>
@@ -14039,7 +14573,73 @@
                 <a:ea typeface="Malgun Gothic" pitchFamily="34" charset="-122"/>
                 <a:cs typeface="Malgun Gothic" pitchFamily="34" charset="-120"/>
               </a:rPr>
-              <a:t>핵심 기여: “영상 + 수치 + 건강정보”의 적절성 자체를 동일 시행의 ablation으로 검증한다.</a:t>
+              <a:t>핵심 기여: “</a:t>
+            </a:r>
+            <a:r>
+              <a:rPr lang="ko-KR" altLang="en-US" sz="1600" b="1" dirty="0">
+                <a:solidFill>
+                  <a:srgbClr val="E1473F"/>
+                </a:solidFill>
+                <a:latin typeface="Malgun Gothic" pitchFamily="34" charset="0"/>
+                <a:ea typeface="Malgun Gothic" pitchFamily="34" charset="-122"/>
+                <a:cs typeface="Malgun Gothic" pitchFamily="34" charset="-120"/>
+              </a:rPr>
+              <a:t>영상 </a:t>
+            </a:r>
+            <a:r>
+              <a:rPr lang="en-US" altLang="ko-KR" sz="1600" b="1" dirty="0">
+                <a:solidFill>
+                  <a:srgbClr val="E1473F"/>
+                </a:solidFill>
+                <a:latin typeface="Malgun Gothic" pitchFamily="34" charset="0"/>
+                <a:ea typeface="Malgun Gothic" pitchFamily="34" charset="-122"/>
+                <a:cs typeface="Malgun Gothic" pitchFamily="34" charset="-120"/>
+              </a:rPr>
+              <a:t>+ </a:t>
+            </a:r>
+            <a:r>
+              <a:rPr lang="ko-KR" altLang="en-US" sz="1600" b="1" dirty="0">
+                <a:solidFill>
+                  <a:srgbClr val="E1473F"/>
+                </a:solidFill>
+                <a:latin typeface="Malgun Gothic" pitchFamily="34" charset="0"/>
+                <a:ea typeface="Malgun Gothic" pitchFamily="34" charset="-122"/>
+                <a:cs typeface="Malgun Gothic" pitchFamily="34" charset="-120"/>
+              </a:rPr>
+              <a:t>운동학 </a:t>
+            </a:r>
+            <a:r>
+              <a:rPr lang="en-US" altLang="ko-KR" sz="1600" b="1" dirty="0">
+                <a:solidFill>
+                  <a:srgbClr val="E1473F"/>
+                </a:solidFill>
+                <a:latin typeface="Malgun Gothic" pitchFamily="34" charset="0"/>
+                <a:ea typeface="Malgun Gothic" pitchFamily="34" charset="-122"/>
+                <a:cs typeface="Malgun Gothic" pitchFamily="34" charset="-120"/>
+              </a:rPr>
+              <a:t>+ </a:t>
+            </a:r>
+            <a:r>
+              <a:rPr lang="ko-KR" altLang="en-US" sz="1600" b="1" dirty="0">
+                <a:solidFill>
+                  <a:srgbClr val="E1473F"/>
+                </a:solidFill>
+                <a:latin typeface="Malgun Gothic" pitchFamily="34" charset="0"/>
+                <a:ea typeface="Malgun Gothic" pitchFamily="34" charset="-122"/>
+                <a:cs typeface="Malgun Gothic" pitchFamily="34" charset="-120"/>
+              </a:rPr>
+              <a:t>건강인 참조정보</a:t>
+            </a:r>
+            <a:r>
+              <a:rPr lang="en-US" sz="1600" b="1" dirty="0">
+                <a:solidFill>
+                  <a:srgbClr val="E1473F"/>
+                </a:solidFill>
+                <a:latin typeface="Malgun Gothic" pitchFamily="34" charset="0"/>
+                <a:ea typeface="Malgun Gothic" pitchFamily="34" charset="-122"/>
+                <a:cs typeface="Malgun Gothic" pitchFamily="34" charset="-120"/>
+              </a:rPr>
+              <a:t>”의 적절성 자체를 동일 시행의 ablation으로 검증한다.</a:t>
             </a:r>
             <a:endParaRPr lang="en-US" sz="1400" dirty="0"/>
           </a:p>
@@ -15433,8 +16033,8 @@
         </p:nvSpPr>
         <p:spPr>
           <a:xfrm>
-            <a:off x="9372600" y="6565392"/>
-            <a:ext cx="2240280" cy="128016"/>
+            <a:off x="8845327" y="6138886"/>
+            <a:ext cx="2767553" cy="335067"/>
           </a:xfrm>
           <a:prstGeom prst="rect">
             <a:avLst/>
@@ -15450,7 +16050,7 @@
               <a:buNone/>
             </a:pPr>
             <a:r>
-              <a:rPr lang="en-US" sz="950" dirty="0">
+              <a:rPr lang="en-US" sz="1000" dirty="0">
                 <a:solidFill>
                   <a:srgbClr val="8B95A1"/>
                 </a:solidFill>
@@ -15460,7 +16060,7 @@
               </a:rPr>
               <a:t>2026.09 | RGB-D·VLM 손 기능 평가 연구</a:t>
             </a:r>
-            <a:endParaRPr lang="en-US" sz="760" dirty="0"/>
+            <a:endParaRPr lang="en-US" sz="800" dirty="0"/>
           </a:p>
         </p:txBody>
       </p:sp>
@@ -16303,7 +16903,7 @@
         </p:nvSpPr>
         <p:spPr>
           <a:xfrm>
-            <a:off x="9372600" y="6565392"/>
+            <a:off x="9372600" y="6345937"/>
             <a:ext cx="2240280" cy="128016"/>
           </a:xfrm>
           <a:prstGeom prst="rect">
@@ -16475,8 +17075,8 @@
         </p:nvSpPr>
         <p:spPr>
           <a:xfrm>
-            <a:off x="9372600" y="6565392"/>
-            <a:ext cx="2240280" cy="128016"/>
+            <a:off x="9098050" y="6240781"/>
+            <a:ext cx="2514830" cy="301751"/>
           </a:xfrm>
           <a:prstGeom prst="rect">
             <a:avLst/>
@@ -16492,7 +17092,7 @@
               <a:buNone/>
             </a:pPr>
             <a:r>
-              <a:rPr lang="en-US" sz="950" dirty="0">
+              <a:rPr lang="en-US" sz="1000" dirty="0">
                 <a:solidFill>
                   <a:srgbClr val="8B95A1"/>
                 </a:solidFill>
@@ -16502,7 +17102,7 @@
               </a:rPr>
               <a:t>2026.09 | RGB-D·VLM 손 기능 평가 연구</a:t>
             </a:r>
-            <a:endParaRPr lang="en-US" sz="760" dirty="0"/>
+            <a:endParaRPr lang="en-US" sz="800" dirty="0"/>
           </a:p>
         </p:txBody>
       </p:sp>
@@ -17044,8 +17644,8 @@
         </p:nvSpPr>
         <p:spPr>
           <a:xfrm>
-            <a:off x="9372600" y="6565392"/>
-            <a:ext cx="2240280" cy="128016"/>
+            <a:off x="8689097" y="5987253"/>
+            <a:ext cx="2923783" cy="808710"/>
           </a:xfrm>
           <a:prstGeom prst="rect">
             <a:avLst/>
@@ -18191,8 +18791,8 @@
         </p:nvSpPr>
         <p:spPr>
           <a:xfrm>
-            <a:off x="9372600" y="6565392"/>
-            <a:ext cx="2240280" cy="128016"/>
+            <a:off x="8840732" y="6106722"/>
+            <a:ext cx="2772148" cy="586686"/>
           </a:xfrm>
           <a:prstGeom prst="rect">
             <a:avLst/>
@@ -19257,7 +19857,7 @@
         </p:nvGrpSpPr>
         <p:grpSpPr>
           <a:xfrm>
-            <a:off x="1417320" y="5449824"/>
+            <a:off x="1417320" y="4952808"/>
             <a:ext cx="9372600" cy="868680"/>
             <a:chOff x="1417320" y="4681728"/>
             <a:chExt cx="9372600" cy="868680"/>
@@ -19855,7 +20455,7 @@
         </p:nvSpPr>
         <p:spPr>
           <a:xfrm>
-            <a:off x="9372600" y="6565392"/>
+            <a:off x="9372600" y="6327666"/>
             <a:ext cx="2240280" cy="128016"/>
           </a:xfrm>
           <a:prstGeom prst="rect">
@@ -19997,7 +20597,7 @@
         </p:nvSpPr>
         <p:spPr>
           <a:xfrm>
-            <a:off x="438912" y="6519672"/>
+            <a:off x="438912" y="6528862"/>
             <a:ext cx="11292840" cy="0"/>
           </a:xfrm>
           <a:prstGeom prst="line">
@@ -20027,8 +20627,8 @@
         </p:nvSpPr>
         <p:spPr>
           <a:xfrm>
-            <a:off x="9372600" y="6565392"/>
-            <a:ext cx="2240280" cy="128016"/>
+            <a:off x="9038316" y="6175646"/>
+            <a:ext cx="2574564" cy="517762"/>
           </a:xfrm>
           <a:prstGeom prst="rect">
             <a:avLst/>
@@ -22530,12 +23130,12 @@
                 <a:t>Release</a:t>
               </a:r>
               <a:r>
-                <a:rPr lang="ko-KR" altLang="ko-KR" sz="1700" dirty="0" err="1"/>
-                <a:t>만</a:t>
+                <a:rPr lang="en-US" altLang="ko-KR" sz="1700" b="1" dirty="0"/>
+                <a:t> / Open/ Close </a:t>
               </a:r>
               <a:r>
                 <a:rPr lang="ko-KR" altLang="ko-KR" sz="1700" dirty="0"/>
-                <a:t> 판정</a:t>
+                <a:t>만 판정</a:t>
               </a:r>
               <a:endParaRPr lang="en-US" altLang="ko-KR" sz="1700" dirty="0"/>
             </a:p>
@@ -23047,14 +23647,14 @@
           <p:nvPr>
             <p:extLst>
               <p:ext uri="{D42A27DB-BD31-4B8C-83A1-F6EECF244321}">
-                <p14:modId xmlns:p14="http://schemas.microsoft.com/office/powerpoint/2010/main" val="3144116775"/>
+                <p14:modId xmlns:p14="http://schemas.microsoft.com/office/powerpoint/2010/main" val="2170529774"/>
               </p:ext>
             </p:extLst>
           </p:nvPr>
         </p:nvGraphicFramePr>
         <p:xfrm>
           <a:off x="566928" y="4059935"/>
-          <a:ext cx="10863070" cy="2072640"/>
+          <a:ext cx="10863072" cy="1957491"/>
         </p:xfrm>
         <a:graphic>
           <a:graphicData uri="http://schemas.openxmlformats.org/drawingml/2006/table">
@@ -23063,38 +23663,17 @@
                 <a:tableStyleId>{5C22544A-7EE6-4342-B048-85BDC9FD1C3A}</a:tableStyleId>
               </a:tblPr>
               <a:tblGrid>
-                <a:gridCol w="2172614">
+                <a:gridCol w="5431536">
                   <a:extLst>
                     <a:ext uri="{9D8B030D-6E8A-4147-A177-3AD203B41FA5}">
                       <a16:colId xmlns:a16="http://schemas.microsoft.com/office/drawing/2014/main" val="3539208863"/>
                     </a:ext>
                   </a:extLst>
                 </a:gridCol>
-                <a:gridCol w="2172614">
+                <a:gridCol w="5431536">
                   <a:extLst>
                     <a:ext uri="{9D8B030D-6E8A-4147-A177-3AD203B41FA5}">
                       <a16:colId xmlns:a16="http://schemas.microsoft.com/office/drawing/2014/main" val="2600377366"/>
-                    </a:ext>
-                  </a:extLst>
-                </a:gridCol>
-                <a:gridCol w="2172614">
-                  <a:extLst>
-                    <a:ext uri="{9D8B030D-6E8A-4147-A177-3AD203B41FA5}">
-                      <a16:colId xmlns:a16="http://schemas.microsoft.com/office/drawing/2014/main" val="455449173"/>
-                    </a:ext>
-                  </a:extLst>
-                </a:gridCol>
-                <a:gridCol w="2172614">
-                  <a:extLst>
-                    <a:ext uri="{9D8B030D-6E8A-4147-A177-3AD203B41FA5}">
-                      <a16:colId xmlns:a16="http://schemas.microsoft.com/office/drawing/2014/main" val="348788632"/>
-                    </a:ext>
-                  </a:extLst>
-                </a:gridCol>
-                <a:gridCol w="2172614">
-                  <a:extLst>
-                    <a:ext uri="{9D8B030D-6E8A-4147-A177-3AD203B41FA5}">
-                      <a16:colId xmlns:a16="http://schemas.microsoft.com/office/drawing/2014/main" val="1605822294"/>
                     </a:ext>
                   </a:extLst>
                 </a:gridCol>
@@ -23109,57 +23688,8 @@
                         <a:buNone/>
                       </a:pPr>
                       <a:r>
-                        <a:rPr lang="ko-KR" sz="1600" dirty="0"/>
+                        <a:rPr lang="ko-KR"/>
                         <a:t>점수</a:t>
-                      </a:r>
-                    </a:p>
-                  </a:txBody>
-                  <a:tcPr anchor="ctr"/>
-                </a:tc>
-                <a:tc>
-                  <a:txBody>
-                    <a:bodyPr/>
-                    <a:lstStyle/>
-                    <a:p>
-                      <a:pPr algn="ctr">
-                        <a:buNone/>
-                      </a:pPr>
-                      <a:r>
-                        <a:rPr lang="ko-KR" sz="1600" dirty="0" err="1"/>
-                        <a:t>Grasp</a:t>
-                      </a:r>
-                      <a:endParaRPr lang="ko-KR" sz="1600" dirty="0"/>
-                    </a:p>
-                  </a:txBody>
-                  <a:tcPr anchor="ctr"/>
-                </a:tc>
-                <a:tc>
-                  <a:txBody>
-                    <a:bodyPr/>
-                    <a:lstStyle/>
-                    <a:p>
-                      <a:pPr algn="ctr">
-                        <a:buNone/>
-                      </a:pPr>
-                      <a:r>
-                        <a:rPr lang="ko-KR" sz="1600"/>
-                        <a:t>Hold</a:t>
-                      </a:r>
-                    </a:p>
-                  </a:txBody>
-                  <a:tcPr anchor="ctr"/>
-                </a:tc>
-                <a:tc>
-                  <a:txBody>
-                    <a:bodyPr/>
-                    <a:lstStyle/>
-                    <a:p>
-                      <a:pPr algn="ctr">
-                        <a:buNone/>
-                      </a:pPr>
-                      <a:r>
-                        <a:rPr lang="ko-KR" sz="1600"/>
-                        <a:t>Release</a:t>
                       </a:r>
                     </a:p>
                   </a:txBody>
@@ -23174,8 +23704,8 @@
                         <a:buNone/>
                       </a:pPr>
                       <a:r>
-                        <a:rPr lang="ko-KR" sz="1600"/>
-                        <a:t>의미</a:t>
+                        <a:rPr lang="ko-KR"/>
+                        <a:t>사전 정의된 산출 조건</a:t>
                       </a:r>
                     </a:p>
                   </a:txBody>
@@ -23197,59 +23727,10 @@
                         <a:buNone/>
                       </a:pPr>
                       <a:r>
-                        <a:rPr lang="ko-KR" sz="1600" b="1" dirty="0"/>
+                        <a:rPr lang="ko-KR" b="1"/>
                         <a:t>0</a:t>
                       </a:r>
-                      <a:endParaRPr lang="ko-KR" sz="1600" dirty="0"/>
-                    </a:p>
-                  </a:txBody>
-                  <a:tcPr anchor="ctr"/>
-                </a:tc>
-                <a:tc>
-                  <a:txBody>
-                    <a:bodyPr/>
-                    <a:lstStyle/>
-                    <a:p>
-                      <a:pPr algn="ctr">
-                        <a:buNone/>
-                      </a:pPr>
-                      <a:r>
-                        <a:rPr lang="ko-KR" sz="1600" b="1" dirty="0" err="1"/>
-                        <a:t>Incomplete</a:t>
-                      </a:r>
-                      <a:endParaRPr lang="ko-KR" sz="1600" dirty="0"/>
-                    </a:p>
-                  </a:txBody>
-                  <a:tcPr anchor="ctr"/>
-                </a:tc>
-                <a:tc>
-                  <a:txBody>
-                    <a:bodyPr/>
-                    <a:lstStyle/>
-                    <a:p>
-                      <a:pPr algn="ctr">
-                        <a:buNone/>
-                      </a:pPr>
-                      <a:r>
-                        <a:rPr lang="ko-KR" sz="1600" dirty="0"/>
-                        <a:t>NA</a:t>
-                      </a:r>
-                    </a:p>
-                  </a:txBody>
-                  <a:tcPr anchor="ctr"/>
-                </a:tc>
-                <a:tc>
-                  <a:txBody>
-                    <a:bodyPr/>
-                    <a:lstStyle/>
-                    <a:p>
-                      <a:pPr algn="ctr">
-                        <a:buNone/>
-                      </a:pPr>
-                      <a:r>
-                        <a:rPr lang="ko-KR" sz="1600"/>
-                        <a:t>NA</a:t>
-                      </a:r>
+                      <a:endParaRPr lang="ko-KR"/>
                     </a:p>
                   </a:txBody>
                   <a:tcPr anchor="ctr"/>
@@ -23263,9 +23744,10 @@
                         <a:buNone/>
                       </a:pPr>
                       <a:r>
-                        <a:rPr lang="ko-KR" sz="1600"/>
+                        <a:rPr lang="ko-KR" b="1" dirty="0"/>
                         <a:t>파지 미완료</a:t>
                       </a:r>
+                      <a:endParaRPr lang="ko-KR" dirty="0"/>
                     </a:p>
                   </a:txBody>
                   <a:tcPr anchor="ctr"/>
@@ -23286,77 +23768,10 @@
                         <a:buNone/>
                       </a:pPr>
                       <a:r>
-                        <a:rPr lang="ko-KR" sz="1600" b="1"/>
+                        <a:rPr lang="ko-KR" b="1"/>
                         <a:t>1</a:t>
                       </a:r>
-                      <a:endParaRPr lang="ko-KR" sz="1600"/>
-                    </a:p>
-                  </a:txBody>
-                  <a:tcPr anchor="ctr"/>
-                </a:tc>
-                <a:tc>
-                  <a:txBody>
-                    <a:bodyPr/>
-                    <a:lstStyle/>
-                    <a:p>
-                      <a:pPr algn="ctr">
-                        <a:buNone/>
-                      </a:pPr>
-                      <a:r>
-                        <a:rPr lang="ko-KR" sz="1600" b="1" dirty="0" err="1"/>
-                        <a:t>Complete</a:t>
-                      </a:r>
-                      <a:endParaRPr lang="ko-KR" sz="1600" dirty="0"/>
-                    </a:p>
-                  </a:txBody>
-                  <a:tcPr anchor="ctr"/>
-                </a:tc>
-                <a:tc>
-                  <a:txBody>
-                    <a:bodyPr/>
-                    <a:lstStyle/>
-                    <a:p>
-                      <a:pPr algn="ctr">
-                        <a:buNone/>
-                      </a:pPr>
-                      <a:r>
-                        <a:rPr lang="ko-KR" sz="1600" dirty="0" err="1"/>
-                        <a:t>Incomplete</a:t>
-                      </a:r>
-                      <a:r>
-                        <a:rPr lang="ko-KR" sz="1600" dirty="0"/>
-                        <a:t> 또는 </a:t>
-                      </a:r>
-                      <a:r>
-                        <a:rPr lang="ko-KR" sz="1600" dirty="0" err="1"/>
-                        <a:t>Complete</a:t>
-                      </a:r>
-                      <a:endParaRPr lang="ko-KR" sz="1600" dirty="0"/>
-                    </a:p>
-                  </a:txBody>
-                  <a:tcPr anchor="ctr"/>
-                </a:tc>
-                <a:tc>
-                  <a:txBody>
-                    <a:bodyPr/>
-                    <a:lstStyle/>
-                    <a:p>
-                      <a:pPr algn="ctr">
-                        <a:buNone/>
-                      </a:pPr>
-                      <a:r>
-                        <a:rPr lang="ko-KR" sz="1600" dirty="0" err="1"/>
-                        <a:t>Incomplete</a:t>
-                      </a:r>
-                      <a:r>
-                        <a:rPr lang="ko-KR" sz="1600" dirty="0"/>
-                        <a:t> 또는 </a:t>
-                      </a:r>
-                      <a:r>
-                        <a:rPr lang="ko-KR" sz="1600" dirty="0" err="1"/>
-                        <a:t>Complete</a:t>
-                      </a:r>
-                      <a:endParaRPr lang="ko-KR" sz="1600" dirty="0"/>
+                      <a:endParaRPr lang="ko-KR"/>
                     </a:p>
                   </a:txBody>
                   <a:tcPr anchor="ctr"/>
@@ -23370,9 +23785,10 @@
                         <a:buNone/>
                       </a:pPr>
                       <a:r>
-                        <a:rPr lang="ko-KR" sz="1600"/>
-                        <a:t>파지는 완료했지만 Hold 또는 Release 중 하나 이상 미완료</a:t>
+                        <a:rPr lang="ko-KR" b="1"/>
+                        <a:t>파지는 완료했으나, 유지 또는 해제 중 하나 이상 미완료</a:t>
                       </a:r>
+                      <a:endParaRPr lang="ko-KR"/>
                     </a:p>
                   </a:txBody>
                   <a:tcPr anchor="ctr"/>
@@ -23393,61 +23809,10 @@
                         <a:buNone/>
                       </a:pPr>
                       <a:r>
-                        <a:rPr lang="ko-KR" sz="1600" b="1"/>
+                        <a:rPr lang="ko-KR" b="1"/>
                         <a:t>2</a:t>
                       </a:r>
-                      <a:endParaRPr lang="ko-KR" sz="1600"/>
-                    </a:p>
-                  </a:txBody>
-                  <a:tcPr anchor="ctr"/>
-                </a:tc>
-                <a:tc>
-                  <a:txBody>
-                    <a:bodyPr/>
-                    <a:lstStyle/>
-                    <a:p>
-                      <a:pPr algn="ctr">
-                        <a:buNone/>
-                      </a:pPr>
-                      <a:r>
-                        <a:rPr lang="ko-KR" sz="1600" b="1"/>
-                        <a:t>Complete</a:t>
-                      </a:r>
-                      <a:endParaRPr lang="ko-KR" sz="1600"/>
-                    </a:p>
-                  </a:txBody>
-                  <a:tcPr anchor="ctr"/>
-                </a:tc>
-                <a:tc>
-                  <a:txBody>
-                    <a:bodyPr/>
-                    <a:lstStyle/>
-                    <a:p>
-                      <a:pPr algn="ctr">
-                        <a:buNone/>
-                      </a:pPr>
-                      <a:r>
-                        <a:rPr lang="ko-KR" sz="1600" b="1"/>
-                        <a:t>Complete</a:t>
-                      </a:r>
-                      <a:endParaRPr lang="ko-KR" sz="1600"/>
-                    </a:p>
-                  </a:txBody>
-                  <a:tcPr anchor="ctr"/>
-                </a:tc>
-                <a:tc>
-                  <a:txBody>
-                    <a:bodyPr/>
-                    <a:lstStyle/>
-                    <a:p>
-                      <a:pPr algn="ctr">
-                        <a:buNone/>
-                      </a:pPr>
-                      <a:r>
-                        <a:rPr lang="ko-KR" sz="1600" b="1" dirty="0" err="1"/>
-                        <a:t>Complete</a:t>
-                      </a:r>
-                      <a:endParaRPr lang="ko-KR" sz="1600" dirty="0"/>
+                      <a:endParaRPr lang="ko-KR"/>
                     </a:p>
                   </a:txBody>
                   <a:tcPr anchor="ctr"/>
@@ -23461,13 +23826,14 @@
                         <a:buNone/>
                       </a:pPr>
                       <a:r>
-                        <a:rPr lang="ko-KR" sz="1600" dirty="0" err="1"/>
+                        <a:rPr lang="ko-KR" b="1" dirty="0" err="1"/>
                         <a:t>파지·유지·해제</a:t>
                       </a:r>
                       <a:r>
-                        <a:rPr lang="ko-KR" sz="1600" dirty="0"/>
+                        <a:rPr lang="ko-KR" b="1" dirty="0"/>
                         <a:t> 모두 완료</a:t>
                       </a:r>
+                      <a:endParaRPr lang="ko-KR" dirty="0"/>
                     </a:p>
                   </a:txBody>
                   <a:tcPr anchor="ctr"/>
@@ -23482,6 +23848,50 @@
           </a:graphicData>
         </a:graphic>
       </p:graphicFrame>
+      <p:sp>
+        <p:nvSpPr>
+          <p:cNvPr id="32" name="TextBox 31">
+            <a:extLst>
+              <a:ext uri="{FF2B5EF4-FFF2-40B4-BE49-F238E27FC236}">
+                <a16:creationId xmlns:a16="http://schemas.microsoft.com/office/drawing/2014/main" id="{48318DAD-44C7-8E84-C978-920D5418318A}"/>
+              </a:ext>
+            </a:extLst>
+          </p:cNvPr>
+          <p:cNvSpPr txBox="1"/>
+          <p:nvPr/>
+        </p:nvSpPr>
+        <p:spPr>
+          <a:xfrm>
+            <a:off x="502920" y="5980176"/>
+            <a:ext cx="10961542" cy="369332"/>
+          </a:xfrm>
+          <a:prstGeom prst="rect">
+            <a:avLst/>
+          </a:prstGeom>
+          <a:noFill/>
+        </p:spPr>
+        <p:txBody>
+          <a:bodyPr wrap="square">
+            <a:spAutoFit/>
+          </a:bodyPr>
+          <a:lstStyle/>
+          <a:p>
+            <a:r>
+              <a:rPr lang="ko-KR" altLang="ko-KR" dirty="0"/>
+              <a:t>※ 0/1/2는 새로운 임상척도가 아</a:t>
+            </a:r>
+            <a:r>
+              <a:rPr lang="ko-KR" altLang="en-US" dirty="0"/>
+              <a:t>닌</a:t>
+            </a:r>
+            <a:r>
+              <a:rPr lang="ko-KR" altLang="ko-KR" dirty="0"/>
+              <a:t>, 전문가의 판정을 사전 정의된 규칙으로 요약한 연구용 수행점수</a:t>
+            </a:r>
+            <a:endParaRPr lang="ko-KR" altLang="en-US" dirty="0"/>
+          </a:p>
+        </p:txBody>
+      </p:sp>
     </p:spTree>
   </p:cSld>
   <p:clrMapOvr>
